--- a/presentation/Group 28.pptx
+++ b/presentation/Group 28.pptx
@@ -1477,7 +1477,7 @@
           </a:prstGeom>
           <a:extLst>
             <a:ext uri="{C572A759-6A51-4108-AA02-DFA0A04FC94B}">
-              <ma14:wrappingTextBoxFlag xmlns="" xmlns:ma14="http://schemas.microsoft.com/office/mac/drawingml/2011/main" val="0"/>
+              <ma14:wrappingTextBoxFlag xmlns:ma14="http://schemas.microsoft.com/office/mac/drawingml/2011/main" xmlns="" val="0"/>
             </a:ext>
           </a:extLst>
         </p:spPr>
@@ -1602,7 +1602,7 @@
           </a:prstGeom>
           <a:extLst>
             <a:ext uri="{C572A759-6A51-4108-AA02-DFA0A04FC94B}">
-              <ma14:wrappingTextBoxFlag xmlns="" xmlns:ma14="http://schemas.microsoft.com/office/mac/drawingml/2011/main" val="0"/>
+              <ma14:wrappingTextBoxFlag xmlns:ma14="http://schemas.microsoft.com/office/mac/drawingml/2011/main" xmlns="" val="0"/>
             </a:ext>
           </a:extLst>
         </p:spPr>
@@ -1727,7 +1727,7 @@
           </a:prstGeom>
           <a:extLst>
             <a:ext uri="{C572A759-6A51-4108-AA02-DFA0A04FC94B}">
-              <ma14:wrappingTextBoxFlag xmlns="" xmlns:ma14="http://schemas.microsoft.com/office/mac/drawingml/2011/main" val="0"/>
+              <ma14:wrappingTextBoxFlag xmlns:ma14="http://schemas.microsoft.com/office/mac/drawingml/2011/main" xmlns="" val="0"/>
             </a:ext>
           </a:extLst>
         </p:spPr>
@@ -1852,7 +1852,7 @@
           </a:prstGeom>
           <a:extLst>
             <a:ext uri="{C572A759-6A51-4108-AA02-DFA0A04FC94B}">
-              <ma14:wrappingTextBoxFlag xmlns="" xmlns:ma14="http://schemas.microsoft.com/office/mac/drawingml/2011/main" val="0"/>
+              <ma14:wrappingTextBoxFlag xmlns:ma14="http://schemas.microsoft.com/office/mac/drawingml/2011/main" xmlns="" val="0"/>
             </a:ext>
           </a:extLst>
         </p:spPr>
@@ -1930,7 +1930,7 @@
           </a:prstGeom>
           <a:extLst>
             <a:ext uri="{C572A759-6A51-4108-AA02-DFA0A04FC94B}">
-              <ma14:wrappingTextBoxFlag xmlns="" xmlns:ma14="http://schemas.microsoft.com/office/mac/drawingml/2011/main" val="0"/>
+              <ma14:wrappingTextBoxFlag xmlns:ma14="http://schemas.microsoft.com/office/mac/drawingml/2011/main" xmlns="" val="0"/>
             </a:ext>
           </a:extLst>
         </p:spPr>
@@ -2414,18 +2414,7 @@
                 <a:ea typeface="Microsoft YaHei Light" pitchFamily="34" charset="-122"/>
                 <a:cs typeface="Microsoft YaHei Light" pitchFamily="34" charset="-120"/>
               </a:rPr>
-              <a:t>Human–Dog </a:t>
-            </a:r>
-            <a:r>
-              <a:rPr lang="en-US" sz="6600" i="1" dirty="0">
-                <a:solidFill>
-                  <a:schemeClr val="bg1"/>
-                </a:solidFill>
-                <a:latin typeface="Microsoft YaHei Light" pitchFamily="34" charset="0"/>
-                <a:ea typeface="Microsoft YaHei Light" pitchFamily="34" charset="-122"/>
-                <a:cs typeface="Microsoft YaHei Light" pitchFamily="34" charset="-120"/>
-              </a:rPr>
-              <a:t>Interaction</a:t>
+              <a:t>Human–Dog Interaction</a:t>
             </a:r>
             <a:endParaRPr lang="en-US" sz="6600" dirty="0"/>
           </a:p>
@@ -3326,7 +3315,7 @@
           </a:prstGeom>
           <a:extLst>
             <a:ext uri="{C572A759-6A51-4108-AA02-DFA0A04FC94B}">
-              <ma14:wrappingTextBoxFlag xmlns="" xmlns:ma14="http://schemas.microsoft.com/office/mac/drawingml/2011/main" val="0"/>
+              <ma14:wrappingTextBoxFlag xmlns:ma14="http://schemas.microsoft.com/office/mac/drawingml/2011/main" xmlns="" val="0"/>
             </a:ext>
           </a:extLst>
         </p:spPr>
@@ -4413,7 +4402,7 @@
           </a:prstGeom>
           <a:extLst>
             <a:ext uri="{C572A759-6A51-4108-AA02-DFA0A04FC94B}">
-              <ma14:wrappingTextBoxFlag xmlns="" xmlns:ma14="http://schemas.microsoft.com/office/mac/drawingml/2011/main" val="0"/>
+              <ma14:wrappingTextBoxFlag xmlns:ma14="http://schemas.microsoft.com/office/mac/drawingml/2011/main" xmlns="" val="0"/>
             </a:ext>
           </a:extLst>
         </p:spPr>
@@ -6094,7 +6083,7 @@
           </a:prstGeom>
           <a:extLst>
             <a:ext uri="{C572A759-6A51-4108-AA02-DFA0A04FC94B}">
-              <ma14:wrappingTextBoxFlag xmlns="" xmlns:ma14="http://schemas.microsoft.com/office/mac/drawingml/2011/main" val="0"/>
+              <ma14:wrappingTextBoxFlag xmlns:ma14="http://schemas.microsoft.com/office/mac/drawingml/2011/main" xmlns="" val="0"/>
             </a:ext>
           </a:extLst>
         </p:spPr>
@@ -6794,7 +6783,7 @@
           </a:prstGeom>
           <a:extLst>
             <a:ext uri="{C572A759-6A51-4108-AA02-DFA0A04FC94B}">
-              <ma14:wrappingTextBoxFlag xmlns="" xmlns:ma14="http://schemas.microsoft.com/office/mac/drawingml/2011/main" val="0"/>
+              <ma14:wrappingTextBoxFlag xmlns:ma14="http://schemas.microsoft.com/office/mac/drawingml/2011/main" xmlns="" val="0"/>
             </a:ext>
           </a:extLst>
         </p:spPr>
@@ -7595,7 +7584,7 @@
           </a:prstGeom>
           <a:extLst>
             <a:ext uri="{C572A759-6A51-4108-AA02-DFA0A04FC94B}">
-              <ma14:wrappingTextBoxFlag xmlns="" xmlns:ma14="http://schemas.microsoft.com/office/mac/drawingml/2011/main" val="0"/>
+              <ma14:wrappingTextBoxFlag xmlns:ma14="http://schemas.microsoft.com/office/mac/drawingml/2011/main" xmlns="" val="0"/>
             </a:ext>
           </a:extLst>
         </p:spPr>
@@ -8396,7 +8385,7 @@
           </a:prstGeom>
           <a:extLst>
             <a:ext uri="{C572A759-6A51-4108-AA02-DFA0A04FC94B}">
-              <ma14:wrappingTextBoxFlag xmlns="" xmlns:ma14="http://schemas.microsoft.com/office/mac/drawingml/2011/main" val="0"/>
+              <ma14:wrappingTextBoxFlag xmlns:ma14="http://schemas.microsoft.com/office/mac/drawingml/2011/main" xmlns="" val="0"/>
             </a:ext>
           </a:extLst>
         </p:spPr>
@@ -9197,7 +9186,7 @@
           </a:prstGeom>
           <a:extLst>
             <a:ext uri="{C572A759-6A51-4108-AA02-DFA0A04FC94B}">
-              <ma14:wrappingTextBoxFlag xmlns="" xmlns:ma14="http://schemas.microsoft.com/office/mac/drawingml/2011/main" val="0"/>
+              <ma14:wrappingTextBoxFlag xmlns:ma14="http://schemas.microsoft.com/office/mac/drawingml/2011/main" xmlns="" val="0"/>
             </a:ext>
           </a:extLst>
         </p:spPr>
@@ -9998,7 +9987,7 @@
           </a:prstGeom>
           <a:extLst>
             <a:ext uri="{C572A759-6A51-4108-AA02-DFA0A04FC94B}">
-              <ma14:wrappingTextBoxFlag xmlns="" xmlns:ma14="http://schemas.microsoft.com/office/mac/drawingml/2011/main" val="0"/>
+              <ma14:wrappingTextBoxFlag xmlns:ma14="http://schemas.microsoft.com/office/mac/drawingml/2011/main" xmlns="" val="0"/>
             </a:ext>
           </a:extLst>
         </p:spPr>
@@ -10799,7 +10788,7 @@
           </a:prstGeom>
           <a:extLst>
             <a:ext uri="{C572A759-6A51-4108-AA02-DFA0A04FC94B}">
-              <ma14:wrappingTextBoxFlag xmlns="" xmlns:ma14="http://schemas.microsoft.com/office/mac/drawingml/2011/main" val="0"/>
+              <ma14:wrappingTextBoxFlag xmlns:ma14="http://schemas.microsoft.com/office/mac/drawingml/2011/main" xmlns="" val="0"/>
             </a:ext>
           </a:extLst>
         </p:spPr>
@@ -11617,7 +11606,7 @@
           </a:prstGeom>
           <a:extLst>
             <a:ext uri="{C572A759-6A51-4108-AA02-DFA0A04FC94B}">
-              <ma14:wrappingTextBoxFlag xmlns="" xmlns:ma14="http://schemas.microsoft.com/office/mac/drawingml/2011/main" val="0"/>
+              <ma14:wrappingTextBoxFlag xmlns:ma14="http://schemas.microsoft.com/office/mac/drawingml/2011/main" xmlns="" val="0"/>
             </a:ext>
           </a:extLst>
         </p:spPr>

--- a/presentation/Group 28.pptx
+++ b/presentation/Group 28.pptx
@@ -1477,7 +1477,7 @@
           </a:prstGeom>
           <a:extLst>
             <a:ext uri="{C572A759-6A51-4108-AA02-DFA0A04FC94B}">
-              <ma14:wrappingTextBoxFlag xmlns:ma14="http://schemas.microsoft.com/office/mac/drawingml/2011/main" xmlns="" val="0"/>
+              <ma14:wrappingTextBoxFlag xmlns="" xmlns:ma14="http://schemas.microsoft.com/office/mac/drawingml/2011/main" val="0"/>
             </a:ext>
           </a:extLst>
         </p:spPr>
@@ -1602,7 +1602,7 @@
           </a:prstGeom>
           <a:extLst>
             <a:ext uri="{C572A759-6A51-4108-AA02-DFA0A04FC94B}">
-              <ma14:wrappingTextBoxFlag xmlns:ma14="http://schemas.microsoft.com/office/mac/drawingml/2011/main" xmlns="" val="0"/>
+              <ma14:wrappingTextBoxFlag xmlns="" xmlns:ma14="http://schemas.microsoft.com/office/mac/drawingml/2011/main" val="0"/>
             </a:ext>
           </a:extLst>
         </p:spPr>
@@ -1727,7 +1727,7 @@
           </a:prstGeom>
           <a:extLst>
             <a:ext uri="{C572A759-6A51-4108-AA02-DFA0A04FC94B}">
-              <ma14:wrappingTextBoxFlag xmlns:ma14="http://schemas.microsoft.com/office/mac/drawingml/2011/main" xmlns="" val="0"/>
+              <ma14:wrappingTextBoxFlag xmlns="" xmlns:ma14="http://schemas.microsoft.com/office/mac/drawingml/2011/main" val="0"/>
             </a:ext>
           </a:extLst>
         </p:spPr>
@@ -1852,7 +1852,7 @@
           </a:prstGeom>
           <a:extLst>
             <a:ext uri="{C572A759-6A51-4108-AA02-DFA0A04FC94B}">
-              <ma14:wrappingTextBoxFlag xmlns:ma14="http://schemas.microsoft.com/office/mac/drawingml/2011/main" xmlns="" val="0"/>
+              <ma14:wrappingTextBoxFlag xmlns="" xmlns:ma14="http://schemas.microsoft.com/office/mac/drawingml/2011/main" val="0"/>
             </a:ext>
           </a:extLst>
         </p:spPr>
@@ -1930,7 +1930,7 @@
           </a:prstGeom>
           <a:extLst>
             <a:ext uri="{C572A759-6A51-4108-AA02-DFA0A04FC94B}">
-              <ma14:wrappingTextBoxFlag xmlns:ma14="http://schemas.microsoft.com/office/mac/drawingml/2011/main" xmlns="" val="0"/>
+              <ma14:wrappingTextBoxFlag xmlns="" xmlns:ma14="http://schemas.microsoft.com/office/mac/drawingml/2011/main" val="0"/>
             </a:ext>
           </a:extLst>
         </p:spPr>
@@ -2227,6 +2227,14 @@
 <file path=ppt/slides/slide1.xml><?xml version="1.0" encoding="utf-8"?>
 <p:sld xmlns:a="http://schemas.openxmlformats.org/drawingml/2006/main" xmlns:r="http://schemas.openxmlformats.org/officeDocument/2006/relationships" xmlns:p="http://schemas.openxmlformats.org/presentationml/2006/main">
   <p:cSld name="Slide 1">
+    <p:bg>
+      <p:bgPr>
+        <a:solidFill>
+          <a:schemeClr val="bg1"/>
+        </a:solidFill>
+        <a:effectLst/>
+      </p:bgPr>
+    </p:bg>
     <p:spTree>
       <p:nvGrpSpPr>
         <p:cNvPr id="1" name=""/>
@@ -2267,9 +2275,6 @@
             </a:pPr>
             <a:r>
               <a:rPr lang="en-US" sz="1000" kern="0" spc="150" dirty="0">
-                <a:solidFill>
-                  <a:schemeClr val="bg1"/>
-                </a:solidFill>
                 <a:latin typeface="Consolas" pitchFamily="34" charset="0"/>
                 <a:ea typeface="Consolas" pitchFamily="34" charset="-122"/>
                 <a:cs typeface="Consolas" pitchFamily="34" charset="-120"/>
@@ -2306,9 +2311,6 @@
             </a:pPr>
             <a:r>
               <a:rPr lang="en-US" sz="1000" kern="0" spc="150" dirty="0">
-                <a:solidFill>
-                  <a:schemeClr val="bg1"/>
-                </a:solidFill>
                 <a:latin typeface="Consolas" pitchFamily="34" charset="0"/>
                 <a:ea typeface="Consolas" pitchFamily="34" charset="-122"/>
                 <a:cs typeface="Consolas" pitchFamily="34" charset="-120"/>
@@ -2345,9 +2347,6 @@
             </a:pPr>
             <a:r>
               <a:rPr lang="en-US" sz="1100" b="1" kern="0" spc="200" dirty="0">
-                <a:solidFill>
-                  <a:schemeClr val="bg1"/>
-                </a:solidFill>
                 <a:latin typeface="Consolas" pitchFamily="34" charset="0"/>
                 <a:ea typeface="Consolas" pitchFamily="34" charset="-122"/>
                 <a:cs typeface="Consolas" pitchFamily="34" charset="-120"/>
@@ -2367,7 +2366,7 @@
         <p:spPr>
           <a:xfrm>
             <a:off x="548640" y="2011680"/>
-            <a:ext cx="10058400" cy="2377440"/>
+            <a:ext cx="6026095" cy="2377440"/>
           </a:xfrm>
           <a:prstGeom prst="rect">
             <a:avLst/>
@@ -2386,17 +2385,14 @@
               <a:buNone/>
             </a:pPr>
             <a:r>
-              <a:rPr lang="en-US" sz="6600" dirty="0">
-                <a:solidFill>
-                  <a:schemeClr val="bg1"/>
-                </a:solidFill>
+              <a:rPr lang="en-US" sz="4000" dirty="0">
                 <a:latin typeface="Microsoft YaHei Light" pitchFamily="34" charset="0"/>
                 <a:ea typeface="Microsoft YaHei Light" pitchFamily="34" charset="-122"/>
                 <a:cs typeface="Microsoft YaHei Light" pitchFamily="34" charset="-120"/>
               </a:rPr>
               <a:t>Indoor Dog Behavior &amp;</a:t>
             </a:r>
-            <a:endParaRPr lang="en-US" sz="6600" dirty="0"/>
+            <a:endParaRPr lang="en-US" sz="4000" dirty="0"/>
           </a:p>
           <a:p>
             <a:pPr marL="0" indent="0">
@@ -2406,17 +2402,14 @@
               <a:buNone/>
             </a:pPr>
             <a:r>
-              <a:rPr lang="en-US" sz="6600" dirty="0">
-                <a:solidFill>
-                  <a:schemeClr val="bg1"/>
-                </a:solidFill>
+              <a:rPr lang="en-US" sz="4000" dirty="0">
                 <a:latin typeface="Microsoft YaHei Light" pitchFamily="34" charset="0"/>
                 <a:ea typeface="Microsoft YaHei Light" pitchFamily="34" charset="-122"/>
                 <a:cs typeface="Microsoft YaHei Light" pitchFamily="34" charset="-120"/>
               </a:rPr>
               <a:t>Human–Dog Interaction</a:t>
             </a:r>
-            <a:endParaRPr lang="en-US" sz="6600" dirty="0"/>
+            <a:endParaRPr lang="en-US" sz="4000" dirty="0"/>
           </a:p>
         </p:txBody>
       </p:sp>
@@ -2475,14 +2468,9 @@
               <a:buNone/>
             </a:pPr>
             <a:r>
-              <a:rPr lang="en-US" sz="1800" dirty="0">
-                <a:solidFill>
-                  <a:schemeClr val="bg1"/>
-                </a:solidFill>
-              </a:rPr>
+              <a:rPr lang="en-US" sz="1800" dirty="0"/>
               <a:t>Recognition via dual-species RTMPose skeletons + ST-GCN temporal modeling</a:t>
             </a:r>
-            <a:endParaRPr lang="en-US" sz="1800" dirty="0"/>
           </a:p>
         </p:txBody>
       </p:sp>
@@ -2512,9 +2500,6 @@
             </a:pPr>
             <a:r>
               <a:rPr lang="en-US" sz="1100" kern="0" spc="200" dirty="0">
-                <a:solidFill>
-                  <a:schemeClr val="bg1"/>
-                </a:solidFill>
                 <a:latin typeface="Consolas" pitchFamily="34" charset="0"/>
                 <a:ea typeface="Consolas" pitchFamily="34" charset="-122"/>
                 <a:cs typeface="Consolas" pitchFamily="34" charset="-120"/>
@@ -2525,6 +2510,37 @@
           </a:p>
         </p:txBody>
       </p:sp>
+      <p:pic>
+        <p:nvPicPr>
+          <p:cNvPr id="10" name="图片 9">
+            <a:extLst>
+              <a:ext uri="{FF2B5EF4-FFF2-40B4-BE49-F238E27FC236}">
+                <a16:creationId xmlns:a16="http://schemas.microsoft.com/office/drawing/2014/main" id="{279BFB0F-8E73-857D-89E1-4D883C6BE1BB}"/>
+              </a:ext>
+            </a:extLst>
+          </p:cNvPr>
+          <p:cNvPicPr>
+            <a:picLocks noChangeAspect="1"/>
+          </p:cNvPicPr>
+          <p:nvPr/>
+        </p:nvPicPr>
+        <p:blipFill>
+          <a:blip r:embed="rId3"/>
+          <a:srcRect l="11894" t="10834" r="12434" b="11333"/>
+          <a:stretch>
+            <a:fillRect/>
+          </a:stretch>
+        </p:blipFill>
+        <p:spPr>
+          <a:xfrm>
+            <a:off x="6552667" y="749807"/>
+            <a:ext cx="5090388" cy="4072310"/>
+          </a:xfrm>
+          <a:prstGeom prst="rect">
+            <a:avLst/>
+          </a:prstGeom>
+        </p:spPr>
+      </p:pic>
     </p:spTree>
   </p:cSld>
   <p:clrMapOvr>
@@ -3315,7 +3331,7 @@
           </a:prstGeom>
           <a:extLst>
             <a:ext uri="{C572A759-6A51-4108-AA02-DFA0A04FC94B}">
-              <ma14:wrappingTextBoxFlag xmlns:ma14="http://schemas.microsoft.com/office/mac/drawingml/2011/main" xmlns="" val="0"/>
+              <ma14:wrappingTextBoxFlag xmlns="" xmlns:ma14="http://schemas.microsoft.com/office/mac/drawingml/2011/main" val="0"/>
             </a:ext>
           </a:extLst>
         </p:spPr>
@@ -4402,7 +4418,7 @@
           </a:prstGeom>
           <a:extLst>
             <a:ext uri="{C572A759-6A51-4108-AA02-DFA0A04FC94B}">
-              <ma14:wrappingTextBoxFlag xmlns:ma14="http://schemas.microsoft.com/office/mac/drawingml/2011/main" xmlns="" val="0"/>
+              <ma14:wrappingTextBoxFlag xmlns="" xmlns:ma14="http://schemas.microsoft.com/office/mac/drawingml/2011/main" val="0"/>
             </a:ext>
           </a:extLst>
         </p:spPr>
@@ -6083,7 +6099,7 @@
           </a:prstGeom>
           <a:extLst>
             <a:ext uri="{C572A759-6A51-4108-AA02-DFA0A04FC94B}">
-              <ma14:wrappingTextBoxFlag xmlns:ma14="http://schemas.microsoft.com/office/mac/drawingml/2011/main" xmlns="" val="0"/>
+              <ma14:wrappingTextBoxFlag xmlns="" xmlns:ma14="http://schemas.microsoft.com/office/mac/drawingml/2011/main" val="0"/>
             </a:ext>
           </a:extLst>
         </p:spPr>
@@ -6783,7 +6799,7 @@
           </a:prstGeom>
           <a:extLst>
             <a:ext uri="{C572A759-6A51-4108-AA02-DFA0A04FC94B}">
-              <ma14:wrappingTextBoxFlag xmlns:ma14="http://schemas.microsoft.com/office/mac/drawingml/2011/main" xmlns="" val="0"/>
+              <ma14:wrappingTextBoxFlag xmlns="" xmlns:ma14="http://schemas.microsoft.com/office/mac/drawingml/2011/main" val="0"/>
             </a:ext>
           </a:extLst>
         </p:spPr>
@@ -7584,7 +7600,7 @@
           </a:prstGeom>
           <a:extLst>
             <a:ext uri="{C572A759-6A51-4108-AA02-DFA0A04FC94B}">
-              <ma14:wrappingTextBoxFlag xmlns:ma14="http://schemas.microsoft.com/office/mac/drawingml/2011/main" xmlns="" val="0"/>
+              <ma14:wrappingTextBoxFlag xmlns="" xmlns:ma14="http://schemas.microsoft.com/office/mac/drawingml/2011/main" val="0"/>
             </a:ext>
           </a:extLst>
         </p:spPr>
@@ -8385,7 +8401,7 @@
           </a:prstGeom>
           <a:extLst>
             <a:ext uri="{C572A759-6A51-4108-AA02-DFA0A04FC94B}">
-              <ma14:wrappingTextBoxFlag xmlns:ma14="http://schemas.microsoft.com/office/mac/drawingml/2011/main" xmlns="" val="0"/>
+              <ma14:wrappingTextBoxFlag xmlns="" xmlns:ma14="http://schemas.microsoft.com/office/mac/drawingml/2011/main" val="0"/>
             </a:ext>
           </a:extLst>
         </p:spPr>
@@ -9186,7 +9202,7 @@
           </a:prstGeom>
           <a:extLst>
             <a:ext uri="{C572A759-6A51-4108-AA02-DFA0A04FC94B}">
-              <ma14:wrappingTextBoxFlag xmlns:ma14="http://schemas.microsoft.com/office/mac/drawingml/2011/main" xmlns="" val="0"/>
+              <ma14:wrappingTextBoxFlag xmlns="" xmlns:ma14="http://schemas.microsoft.com/office/mac/drawingml/2011/main" val="0"/>
             </a:ext>
           </a:extLst>
         </p:spPr>
@@ -9987,7 +10003,7 @@
           </a:prstGeom>
           <a:extLst>
             <a:ext uri="{C572A759-6A51-4108-AA02-DFA0A04FC94B}">
-              <ma14:wrappingTextBoxFlag xmlns:ma14="http://schemas.microsoft.com/office/mac/drawingml/2011/main" xmlns="" val="0"/>
+              <ma14:wrappingTextBoxFlag xmlns="" xmlns:ma14="http://schemas.microsoft.com/office/mac/drawingml/2011/main" val="0"/>
             </a:ext>
           </a:extLst>
         </p:spPr>
@@ -10788,7 +10804,7 @@
           </a:prstGeom>
           <a:extLst>
             <a:ext uri="{C572A759-6A51-4108-AA02-DFA0A04FC94B}">
-              <ma14:wrappingTextBoxFlag xmlns:ma14="http://schemas.microsoft.com/office/mac/drawingml/2011/main" xmlns="" val="0"/>
+              <ma14:wrappingTextBoxFlag xmlns="" xmlns:ma14="http://schemas.microsoft.com/office/mac/drawingml/2011/main" val="0"/>
             </a:ext>
           </a:extLst>
         </p:spPr>
@@ -11606,7 +11622,7 @@
           </a:prstGeom>
           <a:extLst>
             <a:ext uri="{C572A759-6A51-4108-AA02-DFA0A04FC94B}">
-              <ma14:wrappingTextBoxFlag xmlns:ma14="http://schemas.microsoft.com/office/mac/drawingml/2011/main" xmlns="" val="0"/>
+              <ma14:wrappingTextBoxFlag xmlns="" xmlns:ma14="http://schemas.microsoft.com/office/mac/drawingml/2011/main" val="0"/>
             </a:ext>
           </a:extLst>
         </p:spPr>

--- a/presentation/Group 28.pptx
+++ b/presentation/Group 28.pptx
@@ -1477,7 +1477,7 @@
           </a:prstGeom>
           <a:extLst>
             <a:ext uri="{C572A759-6A51-4108-AA02-DFA0A04FC94B}">
-              <ma14:wrappingTextBoxFlag xmlns="" xmlns:ma14="http://schemas.microsoft.com/office/mac/drawingml/2011/main" val="0"/>
+              <ma14:wrappingTextBoxFlag xmlns:ma14="http://schemas.microsoft.com/office/mac/drawingml/2011/main" xmlns="" val="0"/>
             </a:ext>
           </a:extLst>
         </p:spPr>
@@ -1602,7 +1602,7 @@
           </a:prstGeom>
           <a:extLst>
             <a:ext uri="{C572A759-6A51-4108-AA02-DFA0A04FC94B}">
-              <ma14:wrappingTextBoxFlag xmlns="" xmlns:ma14="http://schemas.microsoft.com/office/mac/drawingml/2011/main" val="0"/>
+              <ma14:wrappingTextBoxFlag xmlns:ma14="http://schemas.microsoft.com/office/mac/drawingml/2011/main" xmlns="" val="0"/>
             </a:ext>
           </a:extLst>
         </p:spPr>
@@ -1727,7 +1727,7 @@
           </a:prstGeom>
           <a:extLst>
             <a:ext uri="{C572A759-6A51-4108-AA02-DFA0A04FC94B}">
-              <ma14:wrappingTextBoxFlag xmlns="" xmlns:ma14="http://schemas.microsoft.com/office/mac/drawingml/2011/main" val="0"/>
+              <ma14:wrappingTextBoxFlag xmlns:ma14="http://schemas.microsoft.com/office/mac/drawingml/2011/main" xmlns="" val="0"/>
             </a:ext>
           </a:extLst>
         </p:spPr>
@@ -1852,7 +1852,7 @@
           </a:prstGeom>
           <a:extLst>
             <a:ext uri="{C572A759-6A51-4108-AA02-DFA0A04FC94B}">
-              <ma14:wrappingTextBoxFlag xmlns="" xmlns:ma14="http://schemas.microsoft.com/office/mac/drawingml/2011/main" val="0"/>
+              <ma14:wrappingTextBoxFlag xmlns:ma14="http://schemas.microsoft.com/office/mac/drawingml/2011/main" xmlns="" val="0"/>
             </a:ext>
           </a:extLst>
         </p:spPr>
@@ -1930,7 +1930,7 @@
           </a:prstGeom>
           <a:extLst>
             <a:ext uri="{C572A759-6A51-4108-AA02-DFA0A04FC94B}">
-              <ma14:wrappingTextBoxFlag xmlns="" xmlns:ma14="http://schemas.microsoft.com/office/mac/drawingml/2011/main" val="0"/>
+              <ma14:wrappingTextBoxFlag xmlns:ma14="http://schemas.microsoft.com/office/mac/drawingml/2011/main" xmlns="" val="0"/>
             </a:ext>
           </a:extLst>
         </p:spPr>
@@ -2251,14 +2251,14 @@
       </p:grpSpPr>
       <p:sp>
         <p:nvSpPr>
-          <p:cNvPr id="2" name="t1"/>
-          <p:cNvSpPr txBox="1"/>
-          <p:nvPr/>
-        </p:nvSpPr>
-        <p:spPr>
-          <a:xfrm>
-            <a:off x="548640" y="292608"/>
-            <a:ext cx="5486400" cy="274320"/>
+          <p:cNvPr id="3" name="t2"/>
+          <p:cNvSpPr txBox="1"/>
+          <p:nvPr/>
+        </p:nvSpPr>
+        <p:spPr>
+          <a:xfrm>
+            <a:off x="7985455" y="292608"/>
+            <a:ext cx="3657600" cy="274320"/>
           </a:xfrm>
           <a:prstGeom prst="rect">
             <a:avLst/>
@@ -2270,7 +2270,7 @@
           <a:bodyPr wrap="square" lIns="0" tIns="0" rIns="0" bIns="0" rtlCol="0" anchor="ctr"/>
           <a:lstStyle/>
           <a:p>
-            <a:pPr marL="0" indent="0">
+            <a:pPr marL="0" indent="0" algn="r">
               <a:buNone/>
             </a:pPr>
             <a:r>
@@ -2279,7 +2279,7 @@
                 <a:ea typeface="Consolas" pitchFamily="34" charset="-122"/>
                 <a:cs typeface="Consolas" pitchFamily="34" charset="-120"/>
               </a:rPr>
-              <a:t>DOG BEHAVIOR &amp; HUMAN–DOG INTERACTION · PROPOSAL</a:t>
+              <a:t>GROUP 28</a:t>
             </a:r>
             <a:endParaRPr lang="en-US" sz="1000" dirty="0"/>
           </a:p>
@@ -2287,49 +2287,13 @@
       </p:sp>
       <p:sp>
         <p:nvSpPr>
-          <p:cNvPr id="3" name="t2"/>
-          <p:cNvSpPr txBox="1"/>
-          <p:nvPr/>
-        </p:nvSpPr>
-        <p:spPr>
-          <a:xfrm>
-            <a:off x="7985455" y="292608"/>
-            <a:ext cx="3657600" cy="274320"/>
-          </a:xfrm>
-          <a:prstGeom prst="rect">
-            <a:avLst/>
-          </a:prstGeom>
-          <a:noFill/>
-          <a:ln/>
-        </p:spPr>
-        <p:txBody>
-          <a:bodyPr wrap="square" lIns="0" tIns="0" rIns="0" bIns="0" rtlCol="0" anchor="ctr"/>
-          <a:lstStyle/>
-          <a:p>
-            <a:pPr marL="0" indent="0" algn="r">
-              <a:buNone/>
-            </a:pPr>
-            <a:r>
-              <a:rPr lang="en-US" sz="1000" kern="0" spc="150" dirty="0">
-                <a:latin typeface="Consolas" pitchFamily="34" charset="0"/>
-                <a:ea typeface="Consolas" pitchFamily="34" charset="-122"/>
-                <a:cs typeface="Consolas" pitchFamily="34" charset="-120"/>
-              </a:rPr>
-              <a:t>GROUP 28</a:t>
-            </a:r>
-            <a:endParaRPr lang="en-US" sz="1000" dirty="0"/>
-          </a:p>
-        </p:txBody>
-      </p:sp>
-      <p:sp>
-        <p:nvSpPr>
           <p:cNvPr id="4" name="t3"/>
           <p:cNvSpPr txBox="1"/>
           <p:nvPr/>
         </p:nvSpPr>
         <p:spPr>
           <a:xfrm>
-            <a:off x="548640" y="914400"/>
+            <a:off x="548640" y="295240"/>
             <a:ext cx="7315200" cy="274320"/>
           </a:xfrm>
           <a:prstGeom prst="rect">
@@ -2365,7 +2329,7 @@
         </p:nvSpPr>
         <p:spPr>
           <a:xfrm>
-            <a:off x="548640" y="2011680"/>
+            <a:off x="548640" y="1724960"/>
             <a:ext cx="6026095" cy="2377440"/>
           </a:xfrm>
           <a:prstGeom prst="rect">
@@ -2430,7 +2394,7 @@
           <a:noFill/>
           <a:ln w="9525">
             <a:solidFill>
-              <a:schemeClr val="accent2"/>
+              <a:srgbClr val="DBD0BB"/>
             </a:solidFill>
             <a:prstDash val="solid"/>
           </a:ln>
@@ -2526,15 +2490,15 @@
         </p:nvPicPr>
         <p:blipFill>
           <a:blip r:embed="rId3"/>
-          <a:srcRect l="11894" t="10834" r="12434" b="11333"/>
+          <a:srcRect l="13552" t="10834" r="14272" b="11333"/>
           <a:stretch>
             <a:fillRect/>
           </a:stretch>
         </p:blipFill>
         <p:spPr>
           <a:xfrm>
-            <a:off x="6552667" y="749807"/>
-            <a:ext cx="5090388" cy="4072310"/>
+            <a:off x="6366013" y="749806"/>
+            <a:ext cx="5153439" cy="4322401"/>
           </a:xfrm>
           <a:prstGeom prst="rect">
             <a:avLst/>
@@ -2832,8 +2796,8 @@
         </p:blipFill>
         <p:spPr>
           <a:xfrm>
-            <a:off x="4343400" y="498348"/>
-            <a:ext cx="7315200" cy="4114800"/>
+            <a:off x="3840480" y="498347"/>
+            <a:ext cx="7818120" cy="4397693"/>
           </a:xfrm>
           <a:prstGeom prst="rect">
             <a:avLst/>
@@ -3331,7 +3295,7 @@
           </a:prstGeom>
           <a:extLst>
             <a:ext uri="{C572A759-6A51-4108-AA02-DFA0A04FC94B}">
-              <ma14:wrappingTextBoxFlag xmlns="" xmlns:ma14="http://schemas.microsoft.com/office/mac/drawingml/2011/main" val="0"/>
+              <ma14:wrappingTextBoxFlag xmlns:ma14="http://schemas.microsoft.com/office/mac/drawingml/2011/main" xmlns="" val="0"/>
             </a:ext>
           </a:extLst>
         </p:spPr>
@@ -4418,7 +4382,7 @@
           </a:prstGeom>
           <a:extLst>
             <a:ext uri="{C572A759-6A51-4108-AA02-DFA0A04FC94B}">
-              <ma14:wrappingTextBoxFlag xmlns="" xmlns:ma14="http://schemas.microsoft.com/office/mac/drawingml/2011/main" val="0"/>
+              <ma14:wrappingTextBoxFlag xmlns:ma14="http://schemas.microsoft.com/office/mac/drawingml/2011/main" xmlns="" val="0"/>
             </a:ext>
           </a:extLst>
         </p:spPr>
@@ -5198,45 +5162,6 @@
           </a:p>
         </p:txBody>
       </p:sp>
-      <p:sp>
-        <p:nvSpPr>
-          <p:cNvPr id="23" name="t214"/>
-          <p:cNvSpPr txBox="1"/>
-          <p:nvPr/>
-        </p:nvSpPr>
-        <p:spPr>
-          <a:xfrm>
-            <a:off x="6644488" y="6126480"/>
-            <a:ext cx="4998568" cy="274320"/>
-          </a:xfrm>
-          <a:prstGeom prst="rect">
-            <a:avLst/>
-          </a:prstGeom>
-          <a:noFill/>
-          <a:ln/>
-        </p:spPr>
-        <p:txBody>
-          <a:bodyPr wrap="square" lIns="0" tIns="0" rIns="0" bIns="0" rtlCol="0" anchor="ctr"/>
-          <a:lstStyle/>
-          <a:p>
-            <a:pPr marL="0" indent="0" algn="r">
-              <a:buNone/>
-            </a:pPr>
-            <a:r>
-              <a:rPr lang="en-US" sz="1000" kern="0" spc="150" dirty="0">
-                <a:solidFill>
-                  <a:schemeClr val="accent3"/>
-                </a:solidFill>
-                <a:latin typeface="Consolas" pitchFamily="34" charset="0"/>
-                <a:ea typeface="Consolas" pitchFamily="34" charset="-122"/>
-                <a:cs typeface="Consolas" pitchFamily="34" charset="-120"/>
-              </a:rPr>
-              <a:t>→ QUESTIONS WELCOME · 5 MIN Q&amp;A</a:t>
-            </a:r>
-            <a:endParaRPr lang="en-US" sz="1000" dirty="0"/>
-          </a:p>
-        </p:txBody>
-      </p:sp>
     </p:spTree>
   </p:cSld>
   <p:clrMapOvr>
@@ -6099,7 +6024,7 @@
           </a:prstGeom>
           <a:extLst>
             <a:ext uri="{C572A759-6A51-4108-AA02-DFA0A04FC94B}">
-              <ma14:wrappingTextBoxFlag xmlns="" xmlns:ma14="http://schemas.microsoft.com/office/mac/drawingml/2011/main" val="0"/>
+              <ma14:wrappingTextBoxFlag xmlns:ma14="http://schemas.microsoft.com/office/mac/drawingml/2011/main" xmlns="" val="0"/>
             </a:ext>
           </a:extLst>
         </p:spPr>
@@ -6138,6 +6063,14 @@
 <file path=ppt/slides/slide3.xml><?xml version="1.0" encoding="utf-8"?>
 <p:sld xmlns:a="http://schemas.openxmlformats.org/drawingml/2006/main" xmlns:r="http://schemas.openxmlformats.org/officeDocument/2006/relationships" xmlns:p="http://schemas.openxmlformats.org/presentationml/2006/main">
   <p:cSld name="Slide 3">
+    <p:bg>
+      <p:bgPr>
+        <a:solidFill>
+          <a:schemeClr val="bg1"/>
+        </a:solidFill>
+        <a:effectLst/>
+      </p:bgPr>
+    </p:bg>
     <p:spTree>
       <p:nvGrpSpPr>
         <p:cNvPr id="1" name=""/>
@@ -6523,7 +6456,31 @@
                   <a:schemeClr val="tx1"/>
                 </a:solidFill>
               </a:rPr>
-              <a:t>6 classes: stand/walk · sit · lie/sleep · eat/drink · play · other</a:t>
+              <a:t>8 classes: stand</a:t>
+            </a:r>
+            <a:r>
+              <a:rPr lang="en-US" altLang="zh-CN" sz="1500" dirty="0"/>
+              <a:t> · </a:t>
+            </a:r>
+            <a:r>
+              <a:rPr lang="en-US" sz="1500" dirty="0">
+                <a:solidFill>
+                  <a:schemeClr val="tx1"/>
+                </a:solidFill>
+              </a:rPr>
+              <a:t>walk · run</a:t>
+            </a:r>
+            <a:r>
+              <a:rPr lang="en-US" altLang="zh-CN" sz="1500" dirty="0"/>
+              <a:t> · </a:t>
+            </a:r>
+            <a:r>
+              <a:rPr lang="en-US" sz="1500" dirty="0">
+                <a:solidFill>
+                  <a:schemeClr val="tx1"/>
+                </a:solidFill>
+              </a:rPr>
+              <a:t>sit · lie/sleep · eat/drink · play · other</a:t>
             </a:r>
             <a:endParaRPr lang="en-US" sz="1500" dirty="0"/>
           </a:p>
@@ -6799,7 +6756,7 @@
           </a:prstGeom>
           <a:extLst>
             <a:ext uri="{C572A759-6A51-4108-AA02-DFA0A04FC94B}">
-              <ma14:wrappingTextBoxFlag xmlns="" xmlns:ma14="http://schemas.microsoft.com/office/mac/drawingml/2011/main" val="0"/>
+              <ma14:wrappingTextBoxFlag xmlns:ma14="http://schemas.microsoft.com/office/mac/drawingml/2011/main" xmlns="" val="0"/>
             </a:ext>
           </a:extLst>
         </p:spPr>
@@ -7095,14 +7052,15 @@
         </p:nvPicPr>
         <p:blipFill>
           <a:blip r:embed="rId3"/>
+          <a:srcRect l="1970" t="1222" r="2219" b="7657"/>
           <a:stretch>
             <a:fillRect/>
           </a:stretch>
         </p:blipFill>
         <p:spPr>
           <a:xfrm>
-            <a:off x="4343400" y="498348"/>
-            <a:ext cx="7315200" cy="4114800"/>
+            <a:off x="3879657" y="585216"/>
+            <a:ext cx="7821681" cy="4184347"/>
           </a:xfrm>
           <a:prstGeom prst="rect">
             <a:avLst/>
@@ -7600,7 +7558,7 @@
           </a:prstGeom>
           <a:extLst>
             <a:ext uri="{C572A759-6A51-4108-AA02-DFA0A04FC94B}">
-              <ma14:wrappingTextBoxFlag xmlns="" xmlns:ma14="http://schemas.microsoft.com/office/mac/drawingml/2011/main" val="0"/>
+              <ma14:wrappingTextBoxFlag xmlns:ma14="http://schemas.microsoft.com/office/mac/drawingml/2011/main" xmlns="" val="0"/>
             </a:ext>
           </a:extLst>
         </p:spPr>
@@ -7860,7 +7818,7 @@
                   <a:schemeClr val="tx2"/>
                 </a:solidFill>
               </a:rPr>
-              <a:t>② Own videos: Group ID per dog + full video, split first, then sample frames and clips</a:t>
+              <a:t>② Online videos: Group ID per dog + full video, split first, then sample frames and clips</a:t>
             </a:r>
             <a:endParaRPr lang="en-US" sz="1400" dirty="0"/>
           </a:p>
@@ -7902,8 +7860,8 @@
         </p:blipFill>
         <p:spPr>
           <a:xfrm>
-            <a:off x="4343400" y="498348"/>
-            <a:ext cx="7315200" cy="4114800"/>
+            <a:off x="3971925" y="498347"/>
+            <a:ext cx="7686675" cy="4323755"/>
           </a:xfrm>
           <a:prstGeom prst="rect">
             <a:avLst/>
@@ -8401,7 +8359,7 @@
           </a:prstGeom>
           <a:extLst>
             <a:ext uri="{C572A759-6A51-4108-AA02-DFA0A04FC94B}">
-              <ma14:wrappingTextBoxFlag xmlns="" xmlns:ma14="http://schemas.microsoft.com/office/mac/drawingml/2011/main" val="0"/>
+              <ma14:wrappingTextBoxFlag xmlns:ma14="http://schemas.microsoft.com/office/mac/drawingml/2011/main" xmlns="" val="0"/>
             </a:ext>
           </a:extLst>
         </p:spPr>
@@ -8703,8 +8661,8 @@
         </p:blipFill>
         <p:spPr>
           <a:xfrm>
-            <a:off x="4343400" y="498348"/>
-            <a:ext cx="7315200" cy="4114800"/>
+            <a:off x="3948113" y="498347"/>
+            <a:ext cx="7710487" cy="4337149"/>
           </a:xfrm>
           <a:prstGeom prst="rect">
             <a:avLst/>
@@ -9202,7 +9160,7 @@
           </a:prstGeom>
           <a:extLst>
             <a:ext uri="{C572A759-6A51-4108-AA02-DFA0A04FC94B}">
-              <ma14:wrappingTextBoxFlag xmlns="" xmlns:ma14="http://schemas.microsoft.com/office/mac/drawingml/2011/main" val="0"/>
+              <ma14:wrappingTextBoxFlag xmlns:ma14="http://schemas.microsoft.com/office/mac/drawingml/2011/main" xmlns="" val="0"/>
             </a:ext>
           </a:extLst>
         </p:spPr>
@@ -9498,14 +9456,15 @@
         </p:nvPicPr>
         <p:blipFill>
           <a:blip r:embed="rId3"/>
+          <a:srcRect b="4832"/>
           <a:stretch>
             <a:fillRect/>
           </a:stretch>
         </p:blipFill>
         <p:spPr>
           <a:xfrm>
-            <a:off x="4800600" y="292608"/>
-            <a:ext cx="6400800" cy="4526280"/>
+            <a:off x="4163115" y="292607"/>
+            <a:ext cx="7038286" cy="4736593"/>
           </a:xfrm>
           <a:prstGeom prst="rect">
             <a:avLst/>
@@ -10003,7 +9962,7 @@
           </a:prstGeom>
           <a:extLst>
             <a:ext uri="{C572A759-6A51-4108-AA02-DFA0A04FC94B}">
-              <ma14:wrappingTextBoxFlag xmlns="" xmlns:ma14="http://schemas.microsoft.com/office/mac/drawingml/2011/main" val="0"/>
+              <ma14:wrappingTextBoxFlag xmlns:ma14="http://schemas.microsoft.com/office/mac/drawingml/2011/main" xmlns="" val="0"/>
             </a:ext>
           </a:extLst>
         </p:spPr>
@@ -10299,14 +10258,15 @@
         </p:nvPicPr>
         <p:blipFill>
           <a:blip r:embed="rId3"/>
+          <a:srcRect b="5859"/>
           <a:stretch>
             <a:fillRect/>
           </a:stretch>
         </p:blipFill>
         <p:spPr>
           <a:xfrm>
-            <a:off x="4800600" y="292608"/>
-            <a:ext cx="6400800" cy="4526280"/>
+            <a:off x="4071938" y="292607"/>
+            <a:ext cx="7129462" cy="4746185"/>
           </a:xfrm>
           <a:prstGeom prst="rect">
             <a:avLst/>
@@ -10804,7 +10764,7 @@
           </a:prstGeom>
           <a:extLst>
             <a:ext uri="{C572A759-6A51-4108-AA02-DFA0A04FC94B}">
-              <ma14:wrappingTextBoxFlag xmlns="" xmlns:ma14="http://schemas.microsoft.com/office/mac/drawingml/2011/main" val="0"/>
+              <ma14:wrappingTextBoxFlag xmlns:ma14="http://schemas.microsoft.com/office/mac/drawingml/2011/main" xmlns="" val="0"/>
             </a:ext>
           </a:extLst>
         </p:spPr>
@@ -11117,14 +11077,15 @@
         </p:nvPicPr>
         <p:blipFill>
           <a:blip r:embed="rId3"/>
+          <a:srcRect l="1367" b="4820"/>
           <a:stretch>
             <a:fillRect/>
           </a:stretch>
         </p:blipFill>
         <p:spPr>
           <a:xfrm>
-            <a:off x="4343400" y="498348"/>
-            <a:ext cx="7315200" cy="4114800"/>
+            <a:off x="3901186" y="498348"/>
+            <a:ext cx="7757414" cy="4210812"/>
           </a:xfrm>
           <a:prstGeom prst="rect">
             <a:avLst/>
@@ -11622,7 +11583,7 @@
           </a:prstGeom>
           <a:extLst>
             <a:ext uri="{C572A759-6A51-4108-AA02-DFA0A04FC94B}">
-              <ma14:wrappingTextBoxFlag xmlns="" xmlns:ma14="http://schemas.microsoft.com/office/mac/drawingml/2011/main" val="0"/>
+              <ma14:wrappingTextBoxFlag xmlns:ma14="http://schemas.microsoft.com/office/mac/drawingml/2011/main" xmlns="" val="0"/>
             </a:ext>
           </a:extLst>
         </p:spPr>

--- a/presentation/Group 28.pptx
+++ b/presentation/Group 28.pptx
@@ -1477,7 +1477,7 @@
           </a:prstGeom>
           <a:extLst>
             <a:ext uri="{C572A759-6A51-4108-AA02-DFA0A04FC94B}">
-              <ma14:wrappingTextBoxFlag xmlns:ma14="http://schemas.microsoft.com/office/mac/drawingml/2011/main" xmlns="" val="0"/>
+              <ma14:wrappingTextBoxFlag xmlns="" xmlns:ma14="http://schemas.microsoft.com/office/mac/drawingml/2011/main" val="0"/>
             </a:ext>
           </a:extLst>
         </p:spPr>
@@ -1602,7 +1602,7 @@
           </a:prstGeom>
           <a:extLst>
             <a:ext uri="{C572A759-6A51-4108-AA02-DFA0A04FC94B}">
-              <ma14:wrappingTextBoxFlag xmlns:ma14="http://schemas.microsoft.com/office/mac/drawingml/2011/main" xmlns="" val="0"/>
+              <ma14:wrappingTextBoxFlag xmlns="" xmlns:ma14="http://schemas.microsoft.com/office/mac/drawingml/2011/main" val="0"/>
             </a:ext>
           </a:extLst>
         </p:spPr>
@@ -1727,7 +1727,7 @@
           </a:prstGeom>
           <a:extLst>
             <a:ext uri="{C572A759-6A51-4108-AA02-DFA0A04FC94B}">
-              <ma14:wrappingTextBoxFlag xmlns:ma14="http://schemas.microsoft.com/office/mac/drawingml/2011/main" xmlns="" val="0"/>
+              <ma14:wrappingTextBoxFlag xmlns="" xmlns:ma14="http://schemas.microsoft.com/office/mac/drawingml/2011/main" val="0"/>
             </a:ext>
           </a:extLst>
         </p:spPr>
@@ -1852,7 +1852,7 @@
           </a:prstGeom>
           <a:extLst>
             <a:ext uri="{C572A759-6A51-4108-AA02-DFA0A04FC94B}">
-              <ma14:wrappingTextBoxFlag xmlns:ma14="http://schemas.microsoft.com/office/mac/drawingml/2011/main" xmlns="" val="0"/>
+              <ma14:wrappingTextBoxFlag xmlns="" xmlns:ma14="http://schemas.microsoft.com/office/mac/drawingml/2011/main" val="0"/>
             </a:ext>
           </a:extLst>
         </p:spPr>
@@ -1930,7 +1930,7 @@
           </a:prstGeom>
           <a:extLst>
             <a:ext uri="{C572A759-6A51-4108-AA02-DFA0A04FC94B}">
-              <ma14:wrappingTextBoxFlag xmlns:ma14="http://schemas.microsoft.com/office/mac/drawingml/2011/main" xmlns="" val="0"/>
+              <ma14:wrappingTextBoxFlag xmlns="" xmlns:ma14="http://schemas.microsoft.com/office/mac/drawingml/2011/main" val="0"/>
             </a:ext>
           </a:extLst>
         </p:spPr>
@@ -3295,7 +3295,7 @@
           </a:prstGeom>
           <a:extLst>
             <a:ext uri="{C572A759-6A51-4108-AA02-DFA0A04FC94B}">
-              <ma14:wrappingTextBoxFlag xmlns:ma14="http://schemas.microsoft.com/office/mac/drawingml/2011/main" xmlns="" val="0"/>
+              <ma14:wrappingTextBoxFlag xmlns="" xmlns:ma14="http://schemas.microsoft.com/office/mac/drawingml/2011/main" val="0"/>
             </a:ext>
           </a:extLst>
         </p:spPr>
@@ -4382,7 +4382,7 @@
           </a:prstGeom>
           <a:extLst>
             <a:ext uri="{C572A759-6A51-4108-AA02-DFA0A04FC94B}">
-              <ma14:wrappingTextBoxFlag xmlns:ma14="http://schemas.microsoft.com/office/mac/drawingml/2011/main" xmlns="" val="0"/>
+              <ma14:wrappingTextBoxFlag xmlns="" xmlns:ma14="http://schemas.microsoft.com/office/mac/drawingml/2011/main" val="0"/>
             </a:ext>
           </a:extLst>
         </p:spPr>
@@ -6024,7 +6024,7 @@
           </a:prstGeom>
           <a:extLst>
             <a:ext uri="{C572A759-6A51-4108-AA02-DFA0A04FC94B}">
-              <ma14:wrappingTextBoxFlag xmlns:ma14="http://schemas.microsoft.com/office/mac/drawingml/2011/main" xmlns="" val="0"/>
+              <ma14:wrappingTextBoxFlag xmlns="" xmlns:ma14="http://schemas.microsoft.com/office/mac/drawingml/2011/main" val="0"/>
             </a:ext>
           </a:extLst>
         </p:spPr>
@@ -6732,6 +6732,13 @@
               </a:rPr>
               <a:t>4 classes: none · feeding · petting · playing together</a:t>
             </a:r>
+            <a:br>
+              <a:rPr lang="en-US" sz="1500" dirty="0">
+                <a:solidFill>
+                  <a:schemeClr val="tx1"/>
+                </a:solidFill>
+              </a:rPr>
+            </a:br>
             <a:endParaRPr lang="en-US" sz="1500" dirty="0"/>
           </a:p>
         </p:txBody>
@@ -6756,7 +6763,7 @@
           </a:prstGeom>
           <a:extLst>
             <a:ext uri="{C572A759-6A51-4108-AA02-DFA0A04FC94B}">
-              <ma14:wrappingTextBoxFlag xmlns:ma14="http://schemas.microsoft.com/office/mac/drawingml/2011/main" xmlns="" val="0"/>
+              <ma14:wrappingTextBoxFlag xmlns="" xmlns:ma14="http://schemas.microsoft.com/office/mac/drawingml/2011/main" val="0"/>
             </a:ext>
           </a:extLst>
         </p:spPr>
@@ -7558,7 +7565,7 @@
           </a:prstGeom>
           <a:extLst>
             <a:ext uri="{C572A759-6A51-4108-AA02-DFA0A04FC94B}">
-              <ma14:wrappingTextBoxFlag xmlns:ma14="http://schemas.microsoft.com/office/mac/drawingml/2011/main" xmlns="" val="0"/>
+              <ma14:wrappingTextBoxFlag xmlns="" xmlns:ma14="http://schemas.microsoft.com/office/mac/drawingml/2011/main" val="0"/>
             </a:ext>
           </a:extLst>
         </p:spPr>
@@ -8359,7 +8366,7 @@
           </a:prstGeom>
           <a:extLst>
             <a:ext uri="{C572A759-6A51-4108-AA02-DFA0A04FC94B}">
-              <ma14:wrappingTextBoxFlag xmlns:ma14="http://schemas.microsoft.com/office/mac/drawingml/2011/main" xmlns="" val="0"/>
+              <ma14:wrappingTextBoxFlag xmlns="" xmlns:ma14="http://schemas.microsoft.com/office/mac/drawingml/2011/main" val="0"/>
             </a:ext>
           </a:extLst>
         </p:spPr>
@@ -9160,7 +9167,7 @@
           </a:prstGeom>
           <a:extLst>
             <a:ext uri="{C572A759-6A51-4108-AA02-DFA0A04FC94B}">
-              <ma14:wrappingTextBoxFlag xmlns:ma14="http://schemas.microsoft.com/office/mac/drawingml/2011/main" xmlns="" val="0"/>
+              <ma14:wrappingTextBoxFlag xmlns="" xmlns:ma14="http://schemas.microsoft.com/office/mac/drawingml/2011/main" val="0"/>
             </a:ext>
           </a:extLst>
         </p:spPr>
@@ -9962,7 +9969,7 @@
           </a:prstGeom>
           <a:extLst>
             <a:ext uri="{C572A759-6A51-4108-AA02-DFA0A04FC94B}">
-              <ma14:wrappingTextBoxFlag xmlns:ma14="http://schemas.microsoft.com/office/mac/drawingml/2011/main" xmlns="" val="0"/>
+              <ma14:wrappingTextBoxFlag xmlns="" xmlns:ma14="http://schemas.microsoft.com/office/mac/drawingml/2011/main" val="0"/>
             </a:ext>
           </a:extLst>
         </p:spPr>
@@ -10764,7 +10771,7 @@
           </a:prstGeom>
           <a:extLst>
             <a:ext uri="{C572A759-6A51-4108-AA02-DFA0A04FC94B}">
-              <ma14:wrappingTextBoxFlag xmlns:ma14="http://schemas.microsoft.com/office/mac/drawingml/2011/main" xmlns="" val="0"/>
+              <ma14:wrappingTextBoxFlag xmlns="" xmlns:ma14="http://schemas.microsoft.com/office/mac/drawingml/2011/main" val="0"/>
             </a:ext>
           </a:extLst>
         </p:spPr>
@@ -11583,7 +11590,7 @@
           </a:prstGeom>
           <a:extLst>
             <a:ext uri="{C572A759-6A51-4108-AA02-DFA0A04FC94B}">
-              <ma14:wrappingTextBoxFlag xmlns:ma14="http://schemas.microsoft.com/office/mac/drawingml/2011/main" xmlns="" val="0"/>
+              <ma14:wrappingTextBoxFlag xmlns="" xmlns:ma14="http://schemas.microsoft.com/office/mac/drawingml/2011/main" val="0"/>
             </a:ext>
           </a:extLst>
         </p:spPr>
